--- a/public/pitch-decks/investor-500/pptx/444-sky9.pptx
+++ b/public/pitch-decks/investor-500/pptx/444-sky9.pptx
@@ -1912,7 +1912,7 @@
                   <a:srgbClr val="8B8FA3"/>
                 </a:solidFill>
               </a:rPr>
-              <a:t>Decision Crisis Immunization Infrastructure</a:t>
+              <a:t>Decision Evidence Infrastructure for AI Systems</a:t>
             </a:r>
             <a:endParaRPr lang="en-US" sz="1500" dirty="0"/>
           </a:p>
@@ -2223,7 +2223,7 @@
                   <a:srgbClr val="8B8FA3"/>
                 </a:solidFill>
               </a:rPr>
-              <a:t>Personalized for SKY9 CAPITAL — Chinese enterprise B2B</a:t>
+              <a:t>Prepared for SKY9 CAPITAL — Decision evidence is the next infrastructure default — every enterprise deploying AI will be required to produce decision evidence under regulatory or legal challenge</a:t>
             </a:r>
             <a:endParaRPr lang="en-US" sz="1400" dirty="0"/>
           </a:p>
@@ -2794,7 +2794,7 @@
                   <a:srgbClr val="8B8FA3"/>
                 </a:solidFill>
               </a:rPr>
-              <a:t>AI is eating software. sky9's dedicated AI fund backs infrastructure that becomes the default layer for enterprise AI adoption.</a:t>
+              <a:t>Sky9 Capital invests in venture capital opportunities. Datacendia is the missing governance layer for enterprise AI.</a:t>
             </a:r>
             <a:endParaRPr lang="en-US" sz="1200" dirty="0"/>
           </a:p>
@@ -2895,7 +2895,7 @@
                   <a:srgbClr val="8B8FA3"/>
                 </a:solidFill>
               </a:rPr>
-              <a:t>Datacendia is the missing governance layer for enterprise AI — the infrastructure that sits between AI deployment and regulatory compliance. As AI adoption accelerates, every enterprise needs cryptographic proof of AI decisions.</a:t>
+              <a:t>Datacendia is the missing decision-evidence layer for enterprise AI — the infrastructure that sits between AI deployment and regulatory compliance. As AI adoption accelerates, every enterprise needs cryptographic proof of AI decisions.</a:t>
             </a:r>
             <a:endParaRPr lang="en-US" sz="1100" dirty="0"/>
           </a:p>
@@ -3015,7 +3015,7 @@
                   <a:srgbClr val="D4AF37"/>
                 </a:solidFill>
               </a:rPr>
-              <a:t>Anyscale</a:t>
+              <a:t/>
             </a:r>
             <a:endParaRPr lang="en-US" sz="1100" dirty="0"/>
           </a:p>
@@ -3033,7 +3033,7 @@
                   <a:srgbClr val="D4AF37"/>
                 </a:solidFill>
               </a:rPr>
-              <a:t>Hex</a:t>
+              <a:t/>
             </a:r>
             <a:endParaRPr lang="en-US" sz="1100" dirty="0"/>
           </a:p>
@@ -3051,7 +3051,7 @@
                   <a:srgbClr val="D4AF37"/>
                 </a:solidFill>
               </a:rPr>
-              <a:t>dbt Labs</a:t>
+              <a:t/>
             </a:r>
             <a:endParaRPr lang="en-US" sz="1100" dirty="0"/>
           </a:p>
@@ -3069,7 +3069,7 @@
                   <a:srgbClr val="D4AF37"/>
                 </a:solidFill>
               </a:rPr>
-              <a:t>Replit</a:t>
+              <a:t/>
             </a:r>
             <a:endParaRPr lang="en-US" sz="1100" dirty="0"/>
           </a:p>
@@ -3108,7 +3108,7 @@
                   <a:srgbClr val="8B8FA3"/>
                 </a:solidFill>
               </a:rPr>
-              <a:t>sky9 has backed the data stack (Chinese enterprise SaaS, dbt) and AI infra (Anyscale). Datacendia completes the stack: governance, accountability, and regulatory compliance for every AI decision.</a:t>
+              <a:t>sky9 investment focus aligns with Datacendia. AI governance completes the enterprise stack.</a:t>
             </a:r>
             <a:endParaRPr lang="en-US" sz="1100" dirty="0"/>
           </a:p>
@@ -3320,7 +3320,7 @@
                   <a:srgbClr val="FFFFFF"/>
                 </a:solidFill>
               </a:rPr>
-              <a:t>Enterprise AI Has No Accountability Layer</a:t>
+              <a:t>Enterprise AI Has No Decision Evidence Layer</a:t>
             </a:r>
             <a:endParaRPr lang="en-US" sz="2400" dirty="0"/>
           </a:p>
@@ -3360,7 +3360,7 @@
                   <a:srgbClr val="8B8FA3"/>
                 </a:solidFill>
               </a:rPr>
-              <a:t>AI systems make high-stakes decisions with no audit trail, no evidence, and no dissent tracking</a:t>
+              <a:t>Every enterprise deploying AI will be required to produce decision evidence under regulatory or legal challenge — and no platform exists to generate it</a:t>
             </a:r>
             <a:endParaRPr lang="en-US" sz="1300" dirty="0"/>
           </a:p>
@@ -3414,7 +3414,7 @@
                   <a:srgbClr val="8B8FA3"/>
                 </a:solidFill>
               </a:rPr>
-              <a:t>No existing platform provides cryptographic proof of AI-assisted decisions</a:t>
+              <a:t>No widely adopted platform provides cryptographically verifiable decision evidence at the decision level</a:t>
             </a:r>
             <a:endParaRPr lang="en-US" sz="1300" dirty="0"/>
           </a:p>
@@ -3628,7 +3628,7 @@
                   <a:srgbClr val="8B8FA3"/>
                 </a:solidFill>
               </a:rPr>
-              <a:t>Platforms w/ crypto AI evidence</a:t>
+              <a:t>Widely adopted decision-evidence platforms</a:t>
             </a:r>
             <a:endParaRPr lang="en-US" sz="900" dirty="0"/>
           </a:p>
@@ -4264,7 +4264,7 @@
                   <a:srgbClr val="FFFFFF"/>
                 </a:solidFill>
               </a:rPr>
-              <a:t>Chinese enterprise B2B</a:t>
+              <a:t>Decision evidence is the next infrastructure default — every enterprise deploying AI will be required to produce decision evidence under regulatory or legal challenge</a:t>
             </a:r>
             <a:endParaRPr lang="en-US" sz="1400" dirty="0"/>
           </a:p>
@@ -4326,7 +4326,8 @@
                   <a:srgbClr val="8B8FA3"/>
                 </a:solidFill>
               </a:rPr>
-              <a:t>Sector: AI Infrastructure</a:t>
+              <a:t>Sector: Decision Evidence Infrastructure
+Our moat: We define the evidentiary artifact that regulators will eventually expect. First to codify it wins the category.</a:t>
             </a:r>
             <a:endParaRPr lang="en-US" sz="1200" dirty="0"/>
           </a:p>
@@ -4388,7 +4389,7 @@
                   <a:srgbClr val="D4AF37"/>
                 </a:solidFill>
               </a:rPr>
-              <a:t>90-Day Guarantee</a:t>
+              <a:t>Why This Must Exist Now</a:t>
             </a:r>
             <a:endParaRPr lang="en-US" sz="1300" dirty="0"/>
           </a:p>
@@ -4427,7 +4428,7 @@
                   <a:srgbClr val="8B8FA3"/>
                 </a:solidFill>
               </a:rPr>
-              <a:t>Deploy Datacendia for 90 days on a single strategic problem. If the Council doesn't identify at least 3 critical risks you missed, we refund the pilot fee.</a:t>
+              <a:t>EU AI Act (2025–2026) → enforceable auditability requirements. DORA → operational traceability for financial services. Litigation risk → retrospective scrutiny of AI decisions. Enterprise AI adoption → exploding unaudited decision surface. This creates a new infrastructure requirement: decision evidence.</a:t>
             </a:r>
             <a:endParaRPr lang="en-US" sz="1000" dirty="0"/>
           </a:p>
@@ -6900,7 +6901,7 @@
                   <a:srgbClr val="8B8FA3"/>
                 </a:solidFill>
               </a:rPr>
-              <a:t>2 warm enterprise intros (financial institution, Big 4 channel). NVIDIA Inception member.</a:t>
+              <a:t>Active enterprise design-partner conversations (financial institution, Big 4 channel). NVIDIA Inception member. 3 LOI-stage discussions.</a:t>
             </a:r>
             <a:endParaRPr lang="en-US" sz="1100" dirty="0"/>
           </a:p>
@@ -7001,7 +7002,7 @@
                   <a:srgbClr val="8B8FA3"/>
                 </a:solidFill>
               </a:rPr>
-              <a:t>GTM hiring, SOC 2 Type II certification, first enterprise pilots.</a:t>
+              <a:t>First 3 design partners signed, SOC 2 Type II certification, regulatory validation (EU AI Act compliance audit).</a:t>
             </a:r>
             <a:endParaRPr lang="en-US" sz="1100" dirty="0"/>
           </a:p>

--- a/public/pitch-decks/investor-500/pptx/444-sky9.pptx
+++ b/public/pitch-decks/investor-500/pptx/444-sky9.pptx
@@ -5444,6 +5444,30 @@
           </a:p>
         </p:txBody>
       </p:sp>
+      <p:pic>
+        <p:nvPicPr>
+          <p:cNvPr id="28" name="Picture 27" descr="nvidia-inception-program-badge-rgb-for-screen.png"/>
+          <p:cNvPicPr>
+            <a:picLocks noChangeAspect="1"/>
+          </p:cNvPicPr>
+          <p:nvPr/>
+        </p:nvPicPr>
+        <p:blipFill>
+          <a:blip r:embed="rId3"/>
+          <a:stretch>
+            <a:fillRect/>
+          </a:stretch>
+        </p:blipFill>
+        <p:spPr>
+          <a:xfrm>
+            <a:off x="4892040" y="4023360"/>
+            <a:ext cx="1645920" cy="822960"/>
+          </a:xfrm>
+          <a:prstGeom prst="rect">
+            <a:avLst/>
+          </a:prstGeom>
+        </p:spPr>
+      </p:pic>
     </p:spTree>
   </p:cSld>
   <p:clrMapOvr>
